--- a/Frontend/public/CHEMCONFLUX26 Poster template.pptx
+++ b/Frontend/public/CHEMCONFLUX26 Poster template.pptx
@@ -256,7 +256,7 @@
             <a:fld id="{30FC8EB3-3B5D-4092-A3AD-724591FCF587}" type="datetimeFigureOut">
               <a:rPr lang="en-US" smtClean="0"/>
               <a:pPr/>
-              <a:t>10/7/2026</a:t>
+              <a:t>10/8/2026</a:t>
             </a:fld>
             <a:endParaRPr lang="en-US"/>
           </a:p>
@@ -428,7 +428,7 @@
             <a:fld id="{30FC8EB3-3B5D-4092-A3AD-724591FCF587}" type="datetimeFigureOut">
               <a:rPr lang="en-US" smtClean="0"/>
               <a:pPr/>
-              <a:t>10/7/2026</a:t>
+              <a:t>10/8/2026</a:t>
             </a:fld>
             <a:endParaRPr lang="en-US"/>
           </a:p>
@@ -610,7 +610,7 @@
             <a:fld id="{30FC8EB3-3B5D-4092-A3AD-724591FCF587}" type="datetimeFigureOut">
               <a:rPr lang="en-US" smtClean="0"/>
               <a:pPr/>
-              <a:t>10/7/2026</a:t>
+              <a:t>10/8/2026</a:t>
             </a:fld>
             <a:endParaRPr lang="en-US"/>
           </a:p>
@@ -782,7 +782,7 @@
             <a:fld id="{30FC8EB3-3B5D-4092-A3AD-724591FCF587}" type="datetimeFigureOut">
               <a:rPr lang="en-US" smtClean="0"/>
               <a:pPr/>
-              <a:t>10/7/2026</a:t>
+              <a:t>10/8/2026</a:t>
             </a:fld>
             <a:endParaRPr lang="en-US"/>
           </a:p>
@@ -1028,7 +1028,7 @@
             <a:fld id="{30FC8EB3-3B5D-4092-A3AD-724591FCF587}" type="datetimeFigureOut">
               <a:rPr lang="en-US" smtClean="0"/>
               <a:pPr/>
-              <a:t>10/7/2026</a:t>
+              <a:t>10/8/2026</a:t>
             </a:fld>
             <a:endParaRPr lang="en-US"/>
           </a:p>
@@ -1262,7 +1262,7 @@
             <a:fld id="{30FC8EB3-3B5D-4092-A3AD-724591FCF587}" type="datetimeFigureOut">
               <a:rPr lang="en-US" smtClean="0"/>
               <a:pPr/>
-              <a:t>10/7/2026</a:t>
+              <a:t>10/8/2026</a:t>
             </a:fld>
             <a:endParaRPr lang="en-US"/>
           </a:p>
@@ -1631,7 +1631,7 @@
             <a:fld id="{30FC8EB3-3B5D-4092-A3AD-724591FCF587}" type="datetimeFigureOut">
               <a:rPr lang="en-US" smtClean="0"/>
               <a:pPr/>
-              <a:t>10/7/2026</a:t>
+              <a:t>10/8/2026</a:t>
             </a:fld>
             <a:endParaRPr lang="en-US"/>
           </a:p>
@@ -1751,7 +1751,7 @@
             <a:fld id="{30FC8EB3-3B5D-4092-A3AD-724591FCF587}" type="datetimeFigureOut">
               <a:rPr lang="en-US" smtClean="0"/>
               <a:pPr/>
-              <a:t>10/7/2026</a:t>
+              <a:t>10/8/2026</a:t>
             </a:fld>
             <a:endParaRPr lang="en-US"/>
           </a:p>
@@ -1848,7 +1848,7 @@
             <a:fld id="{30FC8EB3-3B5D-4092-A3AD-724591FCF587}" type="datetimeFigureOut">
               <a:rPr lang="en-US" smtClean="0"/>
               <a:pPr/>
-              <a:t>10/7/2026</a:t>
+              <a:t>10/8/2026</a:t>
             </a:fld>
             <a:endParaRPr lang="en-US"/>
           </a:p>
@@ -2127,7 +2127,7 @@
             <a:fld id="{30FC8EB3-3B5D-4092-A3AD-724591FCF587}" type="datetimeFigureOut">
               <a:rPr lang="en-US" smtClean="0"/>
               <a:pPr/>
-              <a:t>10/7/2026</a:t>
+              <a:t>10/8/2026</a:t>
             </a:fld>
             <a:endParaRPr lang="en-US"/>
           </a:p>
@@ -2386,7 +2386,7 @@
             <a:fld id="{30FC8EB3-3B5D-4092-A3AD-724591FCF587}" type="datetimeFigureOut">
               <a:rPr lang="en-US" smtClean="0"/>
               <a:pPr/>
-              <a:t>10/7/2026</a:t>
+              <a:t>10/8/2026</a:t>
             </a:fld>
             <a:endParaRPr lang="en-US"/>
           </a:p>
@@ -2601,7 +2601,7 @@
             <a:fld id="{30FC8EB3-3B5D-4092-A3AD-724591FCF587}" type="datetimeFigureOut">
               <a:rPr lang="en-US" smtClean="0"/>
               <a:pPr/>
-              <a:t>10/7/2026</a:t>
+              <a:t>10/8/2026</a:t>
             </a:fld>
             <a:endParaRPr lang="en-US"/>
           </a:p>
@@ -3117,7 +3117,7 @@
         </p:nvSpPr>
         <p:spPr>
           <a:xfrm>
-            <a:off x="26308049" y="40886"/>
+            <a:off x="26373329" y="40886"/>
             <a:ext cx="3484589" cy="3539430"/>
           </a:xfrm>
           <a:prstGeom prst="rect">
@@ -4800,7 +4800,9 @@
             <a:r>
               <a:rPr lang="en-US" sz="4400" b="1" dirty="0" smtClean="0">
                 <a:solidFill>
-                  <a:srgbClr val="4F6228"/>
+                  <a:schemeClr val="accent6">
+                    <a:lumMod val="50000"/>
+                  </a:schemeClr>
                 </a:solidFill>
                 <a:latin typeface="Arial" pitchFamily="34" charset="0"/>
                 <a:ea typeface="Times New Roman" pitchFamily="18" charset="0"/>
@@ -4811,7 +4813,9 @@
             <a:r>
               <a:rPr lang="en-US" sz="4400" b="1" baseline="30000" dirty="0" smtClean="0">
                 <a:solidFill>
-                  <a:srgbClr val="4F6228"/>
+                  <a:schemeClr val="accent6">
+                    <a:lumMod val="50000"/>
+                  </a:schemeClr>
                 </a:solidFill>
                 <a:latin typeface="Arial" pitchFamily="34" charset="0"/>
                 <a:ea typeface="Times New Roman" pitchFamily="18" charset="0"/>
@@ -4822,7 +4826,9 @@
             <a:r>
               <a:rPr lang="en-US" sz="4400" b="1" dirty="0" smtClean="0">
                 <a:solidFill>
-                  <a:srgbClr val="4F6228"/>
+                  <a:schemeClr val="accent6">
+                    <a:lumMod val="50000"/>
+                  </a:schemeClr>
                 </a:solidFill>
                 <a:latin typeface="Arial" pitchFamily="34" charset="0"/>
                 <a:ea typeface="Times New Roman" pitchFamily="18" charset="0"/>
@@ -4833,7 +4839,9 @@
             <a:r>
               <a:rPr lang="en-US" sz="4400" b="1" dirty="0">
                 <a:solidFill>
-                  <a:srgbClr val="4F6228"/>
+                  <a:schemeClr val="accent6">
+                    <a:lumMod val="50000"/>
+                  </a:schemeClr>
                 </a:solidFill>
                 <a:latin typeface="Arial" pitchFamily="34" charset="0"/>
                 <a:ea typeface="Times New Roman" pitchFamily="18" charset="0"/>
@@ -4844,7 +4852,9 @@
             <a:r>
               <a:rPr lang="en-US" sz="4400" b="1" dirty="0" smtClean="0">
                 <a:solidFill>
-                  <a:srgbClr val="4F6228"/>
+                  <a:schemeClr val="accent6">
+                    <a:lumMod val="50000"/>
+                  </a:schemeClr>
                 </a:solidFill>
                 <a:latin typeface="Arial" pitchFamily="34" charset="0"/>
                 <a:ea typeface="Times New Roman" pitchFamily="18" charset="0"/>
@@ -4871,7 +4881,9 @@
                   <a:noFill/>
                 </a:ln>
                 <a:solidFill>
-                  <a:srgbClr val="4F6228"/>
+                  <a:schemeClr val="accent6">
+                    <a:lumMod val="50000"/>
+                  </a:schemeClr>
                 </a:solidFill>
                 <a:effectLst/>
                 <a:latin typeface="Arial" pitchFamily="34" charset="0"/>
@@ -4886,7 +4898,9 @@
                   <a:noFill/>
                 </a:ln>
                 <a:solidFill>
-                  <a:srgbClr val="4F6228"/>
+                  <a:schemeClr val="accent6">
+                    <a:lumMod val="50000"/>
+                  </a:schemeClr>
                 </a:solidFill>
                 <a:effectLst/>
                 <a:latin typeface="Arial" pitchFamily="34" charset="0"/>
@@ -4901,7 +4915,9 @@
                   <a:noFill/>
                 </a:ln>
                 <a:solidFill>
-                  <a:srgbClr val="4F6228"/>
+                  <a:schemeClr val="accent6">
+                    <a:lumMod val="50000"/>
+                  </a:schemeClr>
                 </a:solidFill>
                 <a:effectLst/>
                 <a:latin typeface="Arial" pitchFamily="34" charset="0"/>
@@ -4916,7 +4932,9 @@
                   <a:noFill/>
                 </a:ln>
                 <a:solidFill>
-                  <a:srgbClr val="4F6228"/>
+                  <a:schemeClr val="accent6">
+                    <a:lumMod val="50000"/>
+                  </a:schemeClr>
                 </a:solidFill>
                 <a:effectLst/>
                 <a:latin typeface="Arial" pitchFamily="34" charset="0"/>
@@ -4930,7 +4948,9 @@
                 <a:noFill/>
               </a:ln>
               <a:solidFill>
-                <a:schemeClr val="tx1"/>
+                <a:schemeClr val="accent6">
+                  <a:lumMod val="50000"/>
+                </a:schemeClr>
               </a:solidFill>
               <a:effectLst/>
               <a:latin typeface="Arial" pitchFamily="34" charset="0"/>
@@ -4962,7 +4982,9 @@
                   <a:noFill/>
                 </a:ln>
                 <a:solidFill>
-                  <a:srgbClr val="4F6228"/>
+                  <a:schemeClr val="accent6">
+                    <a:lumMod val="50000"/>
+                  </a:schemeClr>
                 </a:solidFill>
                 <a:effectLst/>
                 <a:latin typeface="Arial" pitchFamily="34" charset="0"/>
@@ -4976,7 +4998,9 @@
                 <a:noFill/>
               </a:ln>
               <a:solidFill>
-                <a:schemeClr val="tx1"/>
+                <a:schemeClr val="accent6">
+                  <a:lumMod val="50000"/>
+                </a:schemeClr>
               </a:solidFill>
               <a:effectLst/>
               <a:latin typeface="Arial" pitchFamily="34" charset="0"/>
@@ -5155,32 +5179,6 @@
       </p:sp>
       <p:pic>
         <p:nvPicPr>
-          <p:cNvPr id="3073" name="Picture 4" descr="LOGO_Chem-Conflux20"/>
-          <p:cNvPicPr>
-            <a:picLocks noChangeAspect="1" noChangeArrowheads="1"/>
-          </p:cNvPicPr>
-          <p:nvPr/>
-        </p:nvPicPr>
-        <p:blipFill>
-          <a:blip r:embed="rId2" cstate="print"/>
-          <a:srcRect/>
-          <a:stretch>
-            <a:fillRect/>
-          </a:stretch>
-        </p:blipFill>
-        <p:spPr bwMode="auto">
-          <a:xfrm>
-            <a:off x="22029507" y="971603"/>
-            <a:ext cx="4030823" cy="1954924"/>
-          </a:xfrm>
-          <a:prstGeom prst="rect">
-            <a:avLst/>
-          </a:prstGeom>
-          <a:noFill/>
-        </p:spPr>
-      </p:pic>
-      <p:pic>
-        <p:nvPicPr>
           <p:cNvPr id="2" name="Picture 1"/>
           <p:cNvPicPr>
             <a:picLocks noChangeAspect="1"/>
@@ -5188,7 +5186,7 @@
           <p:nvPr/>
         </p:nvPicPr>
         <p:blipFill>
-          <a:blip r:embed="rId3">
+          <a:blip r:embed="rId2">
             <a:clrChange>
               <a:clrFrom>
                 <a:srgbClr val="FFFFFF"/>
@@ -5208,6 +5206,36 @@
           <a:xfrm>
             <a:off x="725699" y="393490"/>
             <a:ext cx="2302981" cy="3111151"/>
+          </a:xfrm>
+          <a:prstGeom prst="rect">
+            <a:avLst/>
+          </a:prstGeom>
+        </p:spPr>
+      </p:pic>
+      <p:pic>
+        <p:nvPicPr>
+          <p:cNvPr id="3" name="Picture 2"/>
+          <p:cNvPicPr>
+            <a:picLocks noChangeAspect="1"/>
+          </p:cNvPicPr>
+          <p:nvPr/>
+        </p:nvPicPr>
+        <p:blipFill>
+          <a:blip r:embed="rId3">
+            <a:extLst>
+              <a:ext uri="{28A0092B-C50C-407E-A947-70E740481C1C}">
+                <a14:useLocalDpi xmlns:a14="http://schemas.microsoft.com/office/drawing/2010/main" val="0"/>
+              </a:ext>
+            </a:extLst>
+          </a:blip>
+          <a:stretch>
+            <a:fillRect/>
+          </a:stretch>
+        </p:blipFill>
+        <p:spPr>
+          <a:xfrm>
+            <a:off x="21018125" y="1123949"/>
+            <a:ext cx="5289923" cy="1734401"/>
           </a:xfrm>
           <a:prstGeom prst="rect">
             <a:avLst/>
